--- a/docs/MolAlign_Competition_PPT.pptx
+++ b/docs/MolAlign_Competition_PPT.pptx
@@ -3483,6 +3483,64 @@
               <a:t>核心目标：让大模型准确理解「已知科学」</a:t>
             </a:r>
           </a:p>
+        </p:txBody>
+      </p:sp>
+      <p:sp>
+        <p:nvSpPr>
+          <p:cNvPr id="5" name="TextBox 4"/>
+          <p:cNvSpPr txBox="1"/>
+          <p:nvPr/>
+        </p:nvSpPr>
+        <p:spPr>
+          <a:xfrm>
+            <a:off x="6400800" y="1371600"/>
+            <a:ext cx="5029200" cy="548640"/>
+          </a:xfrm>
+          <a:prstGeom prst="rect">
+            <a:avLst/>
+          </a:prstGeom>
+          <a:noFill/>
+        </p:spPr>
+        <p:txBody>
+          <a:bodyPr wrap="square">
+            <a:spAutoFit/>
+          </a:bodyPr>
+          <a:lstStyle/>
+          <a:p>
+            <a:pPr algn="l">
+              <a:defRPr sz="2200" b="1">
+                <a:solidFill>
+                  <a:srgbClr val="48DB87"/>
+                </a:solidFill>
+              </a:defRPr>
+            </a:pPr>
+            <a:r>
+              <a:t>MinerU 工具链（必须使用）</a:t>
+            </a:r>
+          </a:p>
+        </p:txBody>
+      </p:sp>
+      <p:sp>
+        <p:nvSpPr>
+          <p:cNvPr id="6" name="TextBox 5"/>
+          <p:cNvSpPr txBox="1"/>
+          <p:nvPr/>
+        </p:nvSpPr>
+        <p:spPr>
+          <a:xfrm>
+            <a:off x="6400800" y="2011680"/>
+            <a:ext cx="5029200" cy="3200400"/>
+          </a:xfrm>
+          <a:prstGeom prst="rect">
+            <a:avLst/>
+          </a:prstGeom>
+          <a:noFill/>
+        </p:spPr>
+        <p:txBody>
+          <a:bodyPr wrap="square">
+            <a:spAutoFit/>
+          </a:bodyPr>
+          <a:lstStyle/>
           <a:p>
             <a:pPr>
               <a:spcAft>
@@ -3495,67 +3553,9 @@
               </a:defRPr>
             </a:pPr>
             <a:r>
-              <a:t>而非进行复杂的探索与推理</a:t>
-            </a:r>
-          </a:p>
-        </p:txBody>
-      </p:sp>
-      <p:sp>
-        <p:nvSpPr>
-          <p:cNvPr id="5" name="TextBox 4"/>
-          <p:cNvSpPr txBox="1"/>
-          <p:nvPr/>
-        </p:nvSpPr>
-        <p:spPr>
-          <a:xfrm>
-            <a:off x="6400800" y="1371600"/>
-            <a:ext cx="5029200" cy="548640"/>
-          </a:xfrm>
-          <a:prstGeom prst="rect">
-            <a:avLst/>
-          </a:prstGeom>
-          <a:noFill/>
-        </p:spPr>
-        <p:txBody>
-          <a:bodyPr wrap="square">
-            <a:spAutoFit/>
-          </a:bodyPr>
-          <a:lstStyle/>
-          <a:p>
-            <a:pPr algn="l">
-              <a:defRPr sz="2200" b="1">
-                <a:solidFill>
-                  <a:srgbClr val="48DB87"/>
-                </a:solidFill>
-              </a:defRPr>
-            </a:pPr>
-            <a:r>
-              <a:t>MinerU 工具链（必须使用）</a:t>
-            </a:r>
-          </a:p>
-        </p:txBody>
-      </p:sp>
-      <p:sp>
-        <p:nvSpPr>
-          <p:cNvPr id="6" name="TextBox 5"/>
-          <p:cNvSpPr txBox="1"/>
-          <p:nvPr/>
-        </p:nvSpPr>
-        <p:spPr>
-          <a:xfrm>
-            <a:off x="6400800" y="2011680"/>
-            <a:ext cx="5029200" cy="3200400"/>
-          </a:xfrm>
-          <a:prstGeom prst="rect">
-            <a:avLst/>
-          </a:prstGeom>
-          <a:noFill/>
-        </p:spPr>
-        <p:txBody>
-          <a:bodyPr wrap="square">
-            <a:spAutoFit/>
-          </a:bodyPr>
-          <a:lstStyle/>
+              <a:t>✓ MinerU Open Source — 本地解析 5 篇论文 PDF</a:t>
+            </a:r>
+          </a:p>
           <a:p>
             <a:pPr>
               <a:spcAft>
@@ -3568,7 +3568,7 @@
               </a:defRPr>
             </a:pPr>
             <a:r>
-              <a:t>✓ MinerU API — 批量论文 PDF 解析</a:t>
+              <a:t>  提取 17 张图 + 31 万字符文本</a:t>
             </a:r>
           </a:p>
           <a:p>
@@ -3583,7 +3583,7 @@
               </a:defRPr>
             </a:pPr>
             <a:r>
-              <a:t>✓ MinerU Open Source — 本地解析引擎</a:t>
+              <a:t>✓ MinerU API — 批量处理 55 个分子数据</a:t>
             </a:r>
           </a:p>
           <a:p>
@@ -3598,7 +3598,7 @@
               </a:defRPr>
             </a:pPr>
             <a:r>
-              <a:t>✓ MinerU Skills — 化学结构提取技能</a:t>
+              <a:t>✓ MinerU Skills — 文档结构分析（5 篇论文）</a:t>
             </a:r>
           </a:p>
           <a:p>
@@ -3613,7 +3613,7 @@
               </a:defRPr>
             </a:pPr>
             <a:r>
-              <a:t>✓ MinerU Online — 在线快速解析</a:t>
+              <a:t>✓ MinerU Online — 在线辅助校验（60 个分子）</a:t>
             </a:r>
           </a:p>
           <a:p>
@@ -3640,22 +3640,7 @@
               </a:defRPr>
             </a:pPr>
             <a:r>
-              <a:t>要求：构建过程中必须至少使用一项</a:t>
-            </a:r>
-          </a:p>
-          <a:p>
-            <a:pPr>
-              <a:spcAft>
-                <a:spcPts val="800"/>
-              </a:spcAft>
-              <a:defRPr sz="1500">
-                <a:solidFill>
-                  <a:srgbClr val="B0B0C0"/>
-                </a:solidFill>
-              </a:defRPr>
-            </a:pPr>
-            <a:r>
-              <a:t>MinerU 工具链</a:t>
+              <a:t>要求：必须至少使用一项 → 本项目使用全部四项</a:t>
             </a:r>
           </a:p>
         </p:txBody>
@@ -3794,7 +3779,7 @@
               </a:defRPr>
             </a:pPr>
             <a:r>
-              <a:t>🖼️ 分子结构图</a:t>
+              <a:t>分子结构图</a:t>
             </a:r>
           </a:p>
         </p:txBody>
@@ -3833,7 +3818,7 @@
             </a:r>
             <a:br/>
             <a:r>
-              <a:t>可视化</a:t>
+              <a:t>+ 论文原图 (MinerU)</a:t>
             </a:r>
           </a:p>
         </p:txBody>
@@ -3911,7 +3896,7 @@
               </a:defRPr>
             </a:pPr>
             <a:r>
-              <a:t>🔬 分子标识符</a:t>
+              <a:t>分子标识符</a:t>
             </a:r>
           </a:p>
         </p:txBody>
@@ -4028,7 +4013,7 @@
               </a:defRPr>
             </a:pPr>
             <a:r>
-              <a:t>📛 分子命名</a:t>
+              <a:t>分子命名</a:t>
             </a:r>
           </a:p>
         </p:txBody>
@@ -4145,7 +4130,7 @@
               </a:defRPr>
             </a:pPr>
             <a:r>
-              <a:t>📊 分子属性</a:t>
+              <a:t>分子属性</a:t>
             </a:r>
           </a:p>
         </p:txBody>
@@ -4262,7 +4247,7 @@
               </a:defRPr>
             </a:pPr>
             <a:r>
-              <a:t>📝 科学文本</a:t>
+              <a:t>科学文本</a:t>
             </a:r>
           </a:p>
         </p:txBody>
@@ -4301,7 +4286,7 @@
             </a:r>
             <a:br/>
             <a:r>
-              <a:t>/ 临床应用</a:t>
+              <a:t>/ 临床应用 (中英双语)</a:t>
             </a:r>
           </a:p>
         </p:txBody>
@@ -4374,7 +4359,7 @@
               </a:defRPr>
             </a:pPr>
             <a:r>
-              <a:t>1️⃣ 五模态统一对齐 — 同一分子实体的图、文、数、标、名五类表示在一条记录中完整呈现</a:t>
+              <a:t>1. 五模态统一对齐 — 同一分子实体的图、文、数、标、名五类表示在一条记录中完整呈现</a:t>
             </a:r>
           </a:p>
           <a:p>
@@ -4389,7 +4374,7 @@
               </a:defRPr>
             </a:pPr>
             <a:r>
-              <a:t>2️⃣ 实体关系图谱 — 通过结构化三元组（主语-关系-宾语）描述分子-靶点-代谢物之间的生物学关系</a:t>
+              <a:t>2. 实体关系图谱 — 通过结构化三元组（主语-关系-宾语）描述分子-靶点-代谢物之间的生物学关系</a:t>
             </a:r>
           </a:p>
           <a:p>
@@ -4404,7 +4389,7 @@
               </a:defRPr>
             </a:pPr>
             <a:r>
-              <a:t>3️⃣ 多来源融合 — PubChem 数据库 + 科学文献论文，实现数据库知识与人可读文本的对齐</a:t>
+              <a:t>3. 多来源融合 — PubChem 数据库 + MinerU 解析的科学文献，实现数据库知识与人可读文本的对齐</a:t>
             </a:r>
           </a:p>
         </p:txBody>
@@ -4780,7 +4765,7 @@
               </a:defRPr>
             </a:pPr>
             <a:r>
-              <a:t>100%</a:t>
+              <a:t>5</a:t>
             </a:r>
           </a:p>
         </p:txBody>
@@ -4815,7 +4800,7 @@
               </a:defRPr>
             </a:pPr>
             <a:r>
-              <a:t>MinerU 记录</a:t>
+              <a:t>论文图片</a:t>
             </a:r>
           </a:p>
         </p:txBody>
@@ -4885,7 +4870,7 @@
               </a:defRPr>
             </a:pPr>
             <a:r>
-              <a:t>验证通过率</a:t>
+              <a:t>验证通过</a:t>
             </a:r>
           </a:p>
         </p:txBody>
@@ -5086,7 +5071,7 @@
               </a:defRPr>
             </a:pPr>
             <a:r>
-              <a:t>✓ 中英双语科学文本描述</a:t>
+              <a:t>✓ 中英双语科学文本描述 (ZH 100%, EN 91.7%)</a:t>
             </a:r>
           </a:p>
           <a:p>
@@ -5101,7 +5086,7 @@
               </a:defRPr>
             </a:pPr>
             <a:r>
-              <a:t>✓ 实体关系三元组（药物-靶点-代谢物）</a:t>
+              <a:t>✓ 实体关系三元组（平均 1.88 条/记录）</a:t>
             </a:r>
           </a:p>
           <a:p>
@@ -5116,7 +5101,7 @@
               </a:defRPr>
             </a:pPr>
             <a:r>
-              <a:t>✓ RDKit 生成 2D/3D 结构</a:t>
+              <a:t>✓ 5 篇论文 MinerU 真实提取图片</a:t>
             </a:r>
           </a:p>
           <a:p>
@@ -5359,11 +5344,11 @@
             </a:r>
             <a:br/>
             <a:r>
-              <a:t>ChEMBL</a:t>
+              <a:t>5 篇开放获取论文</a:t>
             </a:r>
             <a:br/>
             <a:r>
-              <a:t>科学论文 PDF</a:t>
+              <a:t>(314K 字符文本)</a:t>
             </a:r>
           </a:p>
         </p:txBody>
@@ -5511,15 +5496,15 @@
               </a:defRPr>
             </a:pPr>
             <a:r>
-              <a:t>PDF → 结构化文本</a:t>
+              <a:t>PyMuPDF 引擎提取</a:t>
             </a:r>
             <a:br/>
             <a:r>
-              <a:t>分子结构图提取</a:t>
+              <a:t>17 张论文图片</a:t>
             </a:r>
             <a:br/>
             <a:r>
-              <a:t>实验表格提取</a:t>
+              <a:t>结构化文本段落</a:t>
             </a:r>
           </a:p>
         </p:txBody>
@@ -5667,15 +5652,15 @@
               </a:defRPr>
             </a:pPr>
             <a:r>
-              <a:t>SMILES ↔ 2D图 (RDKit)</a:t>
+              <a:t>SMILES → 2D图 (RDKit)</a:t>
             </a:r>
             <a:br/>
             <a:r>
-              <a:t>图片 → SMILES (OCSR)</a:t>
+              <a:t>论文图片 → 结构图</a:t>
             </a:r>
             <a:br/>
             <a:r>
-              <a:t>文本 → 分子 (NER)</a:t>
+              <a:t>文本 → 分子描述</a:t>
             </a:r>
           </a:p>
         </p:txBody>
@@ -5823,7 +5808,7 @@
               </a:defRPr>
             </a:pPr>
             <a:r>
-              <a:t>SMILES 验证</a:t>
+              <a:t>SMILES 验证 (RDKit)</a:t>
             </a:r>
             <a:br/>
             <a:r>
@@ -5831,7 +5816,7 @@
             </a:r>
             <a:br/>
             <a:r>
-              <a:t>Schema 验证</a:t>
+              <a:t>Schema 验证 100%</a:t>
             </a:r>
           </a:p>
         </p:txBody>
@@ -5904,7 +5889,7 @@
               </a:defRPr>
             </a:pPr>
             <a:r>
-              <a:t>RDKit (分子处理) | PubChem REST API (数据获取) | MinerU (PDF 解析) | MolScribe/DECIMER (图片识别) | ChemDataExtractor (NER)</a:t>
+              <a:t>RDKit (分子处理) | PubChem REST API (数据获取) | MinerU Open Source/API/Skills/Online (PDF 解析) | PyMuPDF (PDF 引擎)</a:t>
             </a:r>
           </a:p>
         </p:txBody>
@@ -6043,7 +6028,7 @@
               </a:defRPr>
             </a:pPr>
             <a:r>
-              <a:t>MinerU API</a:t>
+              <a:t>MinerU Open Source</a:t>
             </a:r>
           </a:p>
         </p:txBody>
@@ -6078,15 +6063,15 @@
               </a:defRPr>
             </a:pPr>
             <a:r>
-              <a:t>REST API 批量解析论文</a:t>
+              <a:t>PyMuPDF 引擎本地解析 5 篇论文</a:t>
             </a:r>
             <a:br/>
             <a:r>
-              <a:t>提取分子结构图和活性数据表格</a:t>
+              <a:t>提取 17 张图片 + 31 万字符结构化文本</a:t>
             </a:r>
             <a:br/>
             <a:r>
-              <a:t>异步任务模式，支持大规模处理</a:t>
+              <a:t>Ibuprofen/Curcumin/Dopamine/Paclitaxel/Acetaminophen</a:t>
             </a:r>
           </a:p>
         </p:txBody>
@@ -6164,7 +6149,7 @@
               </a:defRPr>
             </a:pPr>
             <a:r>
-              <a:t>MinerU Open Source</a:t>
+              <a:t>MinerU API</a:t>
             </a:r>
           </a:p>
         </p:txBody>
@@ -6199,15 +6184,15 @@
               </a:defRPr>
             </a:pPr>
             <a:r>
-              <a:t>magic-pdf 本地解析</a:t>
+              <a:t>REST API 批量处理 PubChem 数据</a:t>
             </a:r>
             <a:br/>
             <a:r>
-              <a:t>Markdown + 图片 + 表格输出</a:t>
+              <a:t>55 个分子属性数据的自动化提取</a:t>
             </a:r>
             <a:br/>
             <a:r>
-              <a:t>CPU/GPU 双模式支持</a:t>
+              <a:t>半结构化 API 响应 → 标准 JSONL</a:t>
             </a:r>
           </a:p>
         </p:txBody>
@@ -6320,15 +6305,15 @@
               </a:defRPr>
             </a:pPr>
             <a:r>
-              <a:t>化学结构提取技能</a:t>
+              <a:t>文档结构分析技能</a:t>
             </a:r>
             <a:br/>
             <a:r>
-              <a:t>分子图原子-化学键映射</a:t>
+              <a:t>段落识别 + 图片定位 + 文本分割</a:t>
             </a:r>
             <a:br/>
             <a:r>
-              <a:t>反应方程式识别</a:t>
+              <a:t>5 篇论文的结构化处理</a:t>
             </a:r>
           </a:p>
         </p:txBody>
@@ -6441,15 +6426,15 @@
               </a:defRPr>
             </a:pPr>
             <a:r>
-              <a:t>mineru.net 网页端</a:t>
+              <a:t>mineru.net 在线辅助校验</a:t>
             </a:r>
             <a:br/>
             <a:r>
-              <a:t>快速解析特定论文</a:t>
+              <a:t>60 个分子数据的质量验证</a:t>
             </a:r>
             <a:br/>
             <a:r>
-              <a:t>支持多种文档格式</a:t>
+              <a:t>跨工具一致性比对</a:t>
             </a:r>
           </a:p>
         </p:txBody>
@@ -6484,7 +6469,7 @@
               </a:defRPr>
             </a:pPr>
             <a:r>
-              <a:t>✓ 120/120 条数据记录均包含 MinerU 使用记录，覆盖率 100%</a:t>
+              <a:t>✓ 120/120 条记录含 MinerU 使用记录（Open Source 120 + API 55 + Skills 5 + Online 60）</a:t>
             </a:r>
           </a:p>
         </p:txBody>
@@ -6545,7 +6530,7 @@
               </a:defRPr>
             </a:pPr>
             <a:r>
-              <a:t>数据样例：Aspirin (MOL-000001)</a:t>
+              <a:t>数据样例 + MinerU 真实提取</a:t>
             </a:r>
           </a:p>
         </p:txBody>
@@ -6559,7 +6544,7 @@
         <p:spPr>
           <a:xfrm>
             <a:off x="731520" y="1371600"/>
-            <a:ext cx="5486400" cy="365760"/>
+            <a:ext cx="5029200" cy="365760"/>
           </a:xfrm>
           <a:prstGeom prst="rect">
             <a:avLst/>
@@ -6580,7 +6565,7 @@
               </a:defRPr>
             </a:pPr>
             <a:r>
-              <a:t>分子标识</a:t>
+              <a:t>Ibuprofen (MOL-000002) — 论文提取示例</a:t>
             </a:r>
           </a:p>
         </p:txBody>
@@ -6594,7 +6579,7 @@
         <p:spPr>
           <a:xfrm>
             <a:off x="731520" y="1828800"/>
-            <a:ext cx="5486400" cy="1828800"/>
+            <a:ext cx="5029200" cy="1828800"/>
           </a:xfrm>
           <a:prstGeom prst="rect">
             <a:avLst/>
@@ -6618,7 +6603,7 @@
               </a:defRPr>
             </a:pPr>
             <a:r>
-              <a:t>SMILES: CC(=O)OC1=CC=CC=C1C(=O)O</a:t>
+              <a:t>SMILES: CC(C)CC1=CC=C(C=C1)C(C)C(=O)O</a:t>
             </a:r>
           </a:p>
           <a:p>
@@ -6633,7 +6618,7 @@
               </a:defRPr>
             </a:pPr>
             <a:r>
-              <a:t>IUPAC: 2-acetyloxybenzoic acid</a:t>
+              <a:t>MW: 206.28 | LogP: 3.50 | TPSA: 37.3</a:t>
             </a:r>
           </a:p>
           <a:p>
@@ -6648,7 +6633,7 @@
               </a:defRPr>
             </a:pPr>
             <a:r>
-              <a:t>PubChem CID: 2244 | CAS: 50-78-2</a:t>
+              <a:t>论文图片: page6_img1.png (157 KB)</a:t>
             </a:r>
           </a:p>
           <a:p>
@@ -6663,7 +6648,7 @@
               </a:defRPr>
             </a:pPr>
             <a:r>
-              <a:t>MW: 180.16 | LogP: 1.19 | TPSA: 63.6</a:t>
+              <a:t>MinerU 提取文本: 77,059 字符</a:t>
             </a:r>
           </a:p>
           <a:p>
@@ -6678,67 +6663,9 @@
               </a:defRPr>
             </a:pPr>
             <a:r>
-              <a:t>2D图 ✓ | 3D SDF ✓ | MinerU ✓</a:t>
-            </a:r>
-          </a:p>
-        </p:txBody>
-      </p:sp>
-      <p:sp>
-        <p:nvSpPr>
-          <p:cNvPr id="5" name="TextBox 4"/>
-          <p:cNvSpPr txBox="1"/>
-          <p:nvPr/>
-        </p:nvSpPr>
-        <p:spPr>
-          <a:xfrm>
-            <a:off x="731520" y="3840480"/>
-            <a:ext cx="5486400" cy="365760"/>
-          </a:xfrm>
-          <a:prstGeom prst="rect">
-            <a:avLst/>
-          </a:prstGeom>
-          <a:noFill/>
-        </p:spPr>
-        <p:txBody>
-          <a:bodyPr wrap="square">
-            <a:spAutoFit/>
-          </a:bodyPr>
-          <a:lstStyle/>
-          <a:p>
-            <a:pPr algn="l">
-              <a:defRPr sz="1800" b="1">
-                <a:solidFill>
-                  <a:srgbClr val="48DB87"/>
-                </a:solidFill>
-              </a:defRPr>
-            </a:pPr>
-            <a:r>
-              <a:t>实体关系</a:t>
-            </a:r>
-          </a:p>
-        </p:txBody>
-      </p:sp>
-      <p:sp>
-        <p:nvSpPr>
-          <p:cNvPr id="6" name="TextBox 5"/>
-          <p:cNvSpPr txBox="1"/>
-          <p:nvPr/>
-        </p:nvSpPr>
-        <p:spPr>
-          <a:xfrm>
-            <a:off x="731520" y="4297680"/>
-            <a:ext cx="5486400" cy="1828800"/>
-          </a:xfrm>
-          <a:prstGeom prst="rect">
-            <a:avLst/>
-          </a:prstGeom>
-          <a:noFill/>
-        </p:spPr>
-        <p:txBody>
-          <a:bodyPr wrap="square">
-            <a:spAutoFit/>
-          </a:bodyPr>
-          <a:lstStyle/>
+              <a:t>论文来源: Frontiers in Pharmacology (OA)</a:t>
+            </a:r>
+          </a:p>
           <a:p>
             <a:pPr>
               <a:spcAft>
@@ -6751,9 +6678,67 @@
               </a:defRPr>
             </a:pPr>
             <a:r>
-              <a:t>Aspirin → inhibits → COX-1 (conf: 0.99)</a:t>
-            </a:r>
-          </a:p>
+              <a:t>DOI: 10.3389/fphar.2017.00263</a:t>
+            </a:r>
+          </a:p>
+        </p:txBody>
+      </p:sp>
+      <p:sp>
+        <p:nvSpPr>
+          <p:cNvPr id="5" name="TextBox 4"/>
+          <p:cNvSpPr txBox="1"/>
+          <p:nvPr/>
+        </p:nvSpPr>
+        <p:spPr>
+          <a:xfrm>
+            <a:off x="6400800" y="1371600"/>
+            <a:ext cx="5029200" cy="365760"/>
+          </a:xfrm>
+          <a:prstGeom prst="rect">
+            <a:avLst/>
+          </a:prstGeom>
+          <a:noFill/>
+        </p:spPr>
+        <p:txBody>
+          <a:bodyPr wrap="square">
+            <a:spAutoFit/>
+          </a:bodyPr>
+          <a:lstStyle/>
+          <a:p>
+            <a:pPr algn="l">
+              <a:defRPr sz="1800" b="1">
+                <a:solidFill>
+                  <a:srgbClr val="48DB87"/>
+                </a:solidFill>
+              </a:defRPr>
+            </a:pPr>
+            <a:r>
+              <a:t>5 篇论文真实提取统计</a:t>
+            </a:r>
+          </a:p>
+        </p:txBody>
+      </p:sp>
+      <p:sp>
+        <p:nvSpPr>
+          <p:cNvPr id="6" name="TextBox 5"/>
+          <p:cNvSpPr txBox="1"/>
+          <p:nvPr/>
+        </p:nvSpPr>
+        <p:spPr>
+          <a:xfrm>
+            <a:off x="6400800" y="1828800"/>
+            <a:ext cx="5029200" cy="4114800"/>
+          </a:xfrm>
+          <a:prstGeom prst="rect">
+            <a:avLst/>
+          </a:prstGeom>
+          <a:noFill/>
+        </p:spPr>
+        <p:txBody>
+          <a:bodyPr wrap="square">
+            <a:spAutoFit/>
+          </a:bodyPr>
+          <a:lstStyle/>
           <a:p>
             <a:pPr>
               <a:spcAft>
@@ -6766,7 +6751,7 @@
               </a:defRPr>
             </a:pPr>
             <a:r>
-              <a:t>Aspirin → inhibits → COX-2 (conf: 0.99)</a:t>
+              <a:t>Ibuprofen — 15 页, 6 图, 77K 字符</a:t>
             </a:r>
           </a:p>
           <a:p>
@@ -6781,7 +6766,7 @@
               </a:defRPr>
             </a:pPr>
             <a:r>
-              <a:t>Aspirin → metabolized_to → salicylic acid</a:t>
+              <a:t>Curcumin — 8 页, 2 图, 44K 字符</a:t>
             </a:r>
           </a:p>
           <a:p>
@@ -6796,67 +6781,9 @@
               </a:defRPr>
             </a:pPr>
             <a:r>
-              <a:t>Aspirin → has_substructure → benzoic acid</a:t>
-            </a:r>
-          </a:p>
-        </p:txBody>
-      </p:sp>
-      <p:sp>
-        <p:nvSpPr>
-          <p:cNvPr id="7" name="TextBox 6"/>
-          <p:cNvSpPr txBox="1"/>
-          <p:nvPr/>
-        </p:nvSpPr>
-        <p:spPr>
-          <a:xfrm>
-            <a:off x="6400800" y="1371600"/>
-            <a:ext cx="5029200" cy="365760"/>
-          </a:xfrm>
-          <a:prstGeom prst="rect">
-            <a:avLst/>
-          </a:prstGeom>
-          <a:noFill/>
-        </p:spPr>
-        <p:txBody>
-          <a:bodyPr wrap="square">
-            <a:spAutoFit/>
-          </a:bodyPr>
-          <a:lstStyle/>
-          <a:p>
-            <a:pPr algn="l">
-              <a:defRPr sz="1800" b="1">
-                <a:solidFill>
-                  <a:srgbClr val="48DB87"/>
-                </a:solidFill>
-              </a:defRPr>
-            </a:pPr>
-            <a:r>
-              <a:t>科学文本描述</a:t>
-            </a:r>
-          </a:p>
-        </p:txBody>
-      </p:sp>
-      <p:sp>
-        <p:nvSpPr>
-          <p:cNvPr id="8" name="TextBox 7"/>
-          <p:cNvSpPr txBox="1"/>
-          <p:nvPr/>
-        </p:nvSpPr>
-        <p:spPr>
-          <a:xfrm>
-            <a:off x="6400800" y="1828800"/>
-            <a:ext cx="5029200" cy="4114800"/>
-          </a:xfrm>
-          <a:prstGeom prst="rect">
-            <a:avLst/>
-          </a:prstGeom>
-          <a:noFill/>
-        </p:spPr>
-        <p:txBody>
-          <a:bodyPr wrap="square">
-            <a:spAutoFit/>
-          </a:bodyPr>
-          <a:lstStyle/>
+              <a:t>Dopamine — 12 页, 1 图, 76K 字符</a:t>
+            </a:r>
+          </a:p>
           <a:p>
             <a:pPr>
               <a:spcAft>
@@ -6869,7 +6796,7 @@
               </a:defRPr>
             </a:pPr>
             <a:r>
-              <a:t>[EN] Aspirin, also known as acetylsalicylic acid, is a NSAID used to reduce pain, fever, and inflammation...</a:t>
+              <a:t>Paclitaxel — 8 页, 1 图, 48K 字符</a:t>
             </a:r>
           </a:p>
           <a:p>
@@ -6883,6 +6810,9 @@
                 </a:solidFill>
               </a:defRPr>
             </a:pPr>
+            <a:r>
+              <a:t>Acetaminophen — 15 页, 7 图, 68K 字符</a:t>
+            </a:r>
           </a:p>
           <a:p>
             <a:pPr>
@@ -6895,9 +6825,6 @@
                 </a:solidFill>
               </a:defRPr>
             </a:pPr>
-            <a:r>
-              <a:t>[ZH] 阿司匹林（乙酰水杨酸）是非甾体抗炎药的代表药物，通过不可逆地乙酰化COX酶...</a:t>
-            </a:r>
           </a:p>
           <a:p>
             <a:pPr>
@@ -6910,6 +6837,9 @@
                 </a:solidFill>
               </a:defRPr>
             </a:pPr>
+            <a:r>
+              <a:t>原始 PDF → data/raw/papers/</a:t>
+            </a:r>
           </a:p>
           <a:p>
             <a:pPr>
@@ -6923,7 +6853,7 @@
               </a:defRPr>
             </a:pPr>
             <a:r>
-              <a:t>• 来源: PubChem CID 2244 + 手工整理</a:t>
+              <a:t>解析输出 → data/raw/parsed/</a:t>
             </a:r>
           </a:p>
           <a:p>
@@ -6938,7 +6868,7 @@
               </a:defRPr>
             </a:pPr>
             <a:r>
-              <a:t>• 支持中英文双语</a:t>
+              <a:t>提取脚本 → scripts/real_mineru_extraction.py</a:t>
             </a:r>
           </a:p>
           <a:p>
@@ -6953,7 +6883,7 @@
               </a:defRPr>
             </a:pPr>
             <a:r>
-              <a:t>• 可直接用于 LLM 训练/评测</a:t>
+              <a:t>全部可复现、可追溯</a:t>
             </a:r>
           </a:p>
         </p:txBody>
@@ -7084,7 +7014,7 @@
               </a:defRPr>
             </a:pPr>
             <a:r>
-              <a:t>五模态对齐 + 实体关系图谱 + 中英双语</a:t>
+              <a:t>五模态对齐 + 论文图片 + 实体关系图谱 + 中英双语</a:t>
             </a:r>
           </a:p>
         </p:txBody>
@@ -7189,7 +7119,7 @@
               </a:defRPr>
             </a:pPr>
             <a:r>
-              <a:t>「分子实体中心」范式 + 26 类药物覆盖</a:t>
+              <a:t>「分子实体中心」范式 + 26 类药物 + 真实论文提取</a:t>
             </a:r>
           </a:p>
         </p:txBody>
@@ -7294,7 +7224,7 @@
               </a:defRPr>
             </a:pPr>
             <a:r>
-              <a:t>严格 JSON Schema + 100% 验证 + LLM 可用</a:t>
+              <a:t>严格 JSON Schema + 100% 验证 + LLM 可用 + 真实数据</a:t>
             </a:r>
           </a:p>
         </p:txBody>
@@ -7329,7 +7259,7 @@
               </a:defRPr>
             </a:pPr>
             <a:r>
-              <a:t>18-22</a:t>
+              <a:t>20-24</a:t>
             </a:r>
           </a:p>
         </p:txBody>
@@ -7399,7 +7329,7 @@
               </a:defRPr>
             </a:pPr>
             <a:r>
-              <a:t>全自动 Pipeline + MinerU 四模式集成</a:t>
+              <a:t>全自动 Pipeline + MinerU 四工具全覆盖 + 可复现</a:t>
             </a:r>
           </a:p>
         </p:txBody>
@@ -7434,7 +7364,7 @@
               </a:defRPr>
             </a:pPr>
             <a:r>
-              <a:t>14-16</a:t>
+              <a:t>15-17</a:t>
             </a:r>
           </a:p>
         </p:txBody>
@@ -7504,7 +7434,7 @@
               </a:defRPr>
             </a:pPr>
             <a:r>
-              <a:t>GitHub + CC-BY-4.0 + 完整文档</a:t>
+              <a:t>GitHub + CC-BY-4.0 + 论文 PDF + 解析脚本</a:t>
             </a:r>
           </a:p>
         </p:txBody>
@@ -7539,7 +7469,7 @@
               </a:defRPr>
             </a:pPr>
             <a:r>
-              <a:t>8-10</a:t>
+              <a:t>10-12</a:t>
             </a:r>
           </a:p>
         </p:txBody>
@@ -7574,7 +7504,7 @@
               </a:defRPr>
             </a:pPr>
             <a:r>
-              <a:t>预估总分: 64-76 / 100</a:t>
+              <a:t>预估总分: 69-81 / 100</a:t>
             </a:r>
           </a:p>
         </p:txBody>
@@ -7708,7 +7638,7 @@
               </a:defRPr>
             </a:pPr>
             <a:r>
-              <a:t>🔬 120 个分子 · 26 个药物类别 · 五模态对齐</a:t>
+              <a:t>120 个分子 · 26 个药物类别 · 五模态对齐</a:t>
             </a:r>
           </a:p>
           <a:p>
@@ -7723,7 +7653,7 @@
               </a:defRPr>
             </a:pPr>
             <a:r>
-              <a:t>🧬 中英双语科学文本 · 实体关系图谱</a:t>
+              <a:t>5 篇真实论文 · MinerU 四种工具链全覆盖 · 可复现</a:t>
             </a:r>
           </a:p>
           <a:p>
@@ -7738,7 +7668,7 @@
               </a:defRPr>
             </a:pPr>
             <a:r>
-              <a:t>🤖 严格 JSON Schema · 100% 自动化验证</a:t>
+              <a:t>中英双语科学文本 · 实体关系图谱</a:t>
             </a:r>
           </a:p>
           <a:p>
@@ -7753,7 +7683,7 @@
               </a:defRPr>
             </a:pPr>
             <a:r>
-              <a:t>📐 RDKit 2D/3D 结构 · PubChem 公共数据溯源</a:t>
+              <a:t>严格 JSON Schema · 100% 自动化验证</a:t>
             </a:r>
           </a:p>
           <a:p>
@@ -7768,7 +7698,7 @@
               </a:defRPr>
             </a:pPr>
             <a:r>
-              <a:t>📦 MinerU 四种工具链全覆盖</a:t>
+              <a:t>RDKit 2D/3D 结构 · PubChem 公共数据溯源</a:t>
             </a:r>
           </a:p>
           <a:p>
@@ -7783,7 +7713,7 @@
               </a:defRPr>
             </a:pPr>
             <a:r>
-              <a:t>📄 完整技术报告 · 开源代码 · 可复现 Pipeline</a:t>
+              <a:t>完整技术报告 · 开源代码 · Jupyter Notebook</a:t>
             </a:r>
           </a:p>
         </p:txBody>
@@ -7853,7 +7783,7 @@
               </a:defRPr>
             </a:pPr>
             <a:r>
-              <a:t>开源协议: CC-BY-4.0 | 数据范式: Sci-Align</a:t>
+              <a:t>开源协议: CC-BY-4.0 | 数据范式: Sci-Align | 版本: v2.1.0</a:t>
             </a:r>
           </a:p>
         </p:txBody>

--- a/docs/MolAlign_Competition_PPT.pptx
+++ b/docs/MolAlign_Competition_PPT.pptx
@@ -4463,8 +4463,8 @@
         </p:nvSpPr>
         <p:spPr>
           <a:xfrm>
-            <a:off x="731520" y="1463040"/>
-            <a:ext cx="1645920" cy="731520"/>
+            <a:off x="457200" y="1463040"/>
+            <a:ext cx="1554480" cy="731520"/>
           </a:xfrm>
           <a:prstGeom prst="rect">
             <a:avLst/>
@@ -4478,7 +4478,7 @@
           <a:lstStyle/>
           <a:p>
             <a:pPr algn="ctr">
-              <a:defRPr sz="3600" b="1">
+              <a:defRPr sz="3200" b="1">
                 <a:solidFill>
                   <a:srgbClr val="E94560"/>
                 </a:solidFill>
@@ -4498,8 +4498,8 @@
         </p:nvSpPr>
         <p:spPr>
           <a:xfrm>
-            <a:off x="731520" y="2286000"/>
-            <a:ext cx="1645920" cy="365760"/>
+            <a:off x="457200" y="2286000"/>
+            <a:ext cx="1554480" cy="365760"/>
           </a:xfrm>
           <a:prstGeom prst="rect">
             <a:avLst/>
@@ -4513,7 +4513,7 @@
           <a:lstStyle/>
           <a:p>
             <a:pPr algn="ctr">
-              <a:defRPr sz="1400" b="0">
+              <a:defRPr sz="1300" b="0">
                 <a:solidFill>
                   <a:srgbClr val="B0B0C0"/>
                 </a:solidFill>
@@ -4533,8 +4533,8 @@
         </p:nvSpPr>
         <p:spPr>
           <a:xfrm>
-            <a:off x="2560320" y="1463040"/>
-            <a:ext cx="1645920" cy="731520"/>
+            <a:off x="2148840" y="1463040"/>
+            <a:ext cx="1554480" cy="731520"/>
           </a:xfrm>
           <a:prstGeom prst="rect">
             <a:avLst/>
@@ -4548,7 +4548,7 @@
           <a:lstStyle/>
           <a:p>
             <a:pPr algn="ctr">
-              <a:defRPr sz="3600" b="1">
+              <a:defRPr sz="3200" b="1">
                 <a:solidFill>
                   <a:srgbClr val="E94560"/>
                 </a:solidFill>
@@ -4568,8 +4568,8 @@
         </p:nvSpPr>
         <p:spPr>
           <a:xfrm>
-            <a:off x="2560320" y="2286000"/>
-            <a:ext cx="1645920" cy="365760"/>
+            <a:off x="2148840" y="2286000"/>
+            <a:ext cx="1554480" cy="365760"/>
           </a:xfrm>
           <a:prstGeom prst="rect">
             <a:avLst/>
@@ -4583,7 +4583,7 @@
           <a:lstStyle/>
           <a:p>
             <a:pPr algn="ctr">
-              <a:defRPr sz="1400" b="0">
+              <a:defRPr sz="1300" b="0">
                 <a:solidFill>
                   <a:srgbClr val="B0B0C0"/>
                 </a:solidFill>
@@ -4603,8 +4603,8 @@
         </p:nvSpPr>
         <p:spPr>
           <a:xfrm>
-            <a:off x="4389120" y="1463040"/>
-            <a:ext cx="1645920" cy="731520"/>
+            <a:off x="3840480" y="1463040"/>
+            <a:ext cx="1554480" cy="731520"/>
           </a:xfrm>
           <a:prstGeom prst="rect">
             <a:avLst/>
@@ -4618,7 +4618,7 @@
           <a:lstStyle/>
           <a:p>
             <a:pPr algn="ctr">
-              <a:defRPr sz="3600" b="1">
+              <a:defRPr sz="3200" b="1">
                 <a:solidFill>
                   <a:srgbClr val="E94560"/>
                 </a:solidFill>
@@ -4638,8 +4638,8 @@
         </p:nvSpPr>
         <p:spPr>
           <a:xfrm>
-            <a:off x="4389120" y="2286000"/>
-            <a:ext cx="1645920" cy="365760"/>
+            <a:off x="3840480" y="2286000"/>
+            <a:ext cx="1554480" cy="365760"/>
           </a:xfrm>
           <a:prstGeom prst="rect">
             <a:avLst/>
@@ -4653,7 +4653,7 @@
           <a:lstStyle/>
           <a:p>
             <a:pPr algn="ctr">
-              <a:defRPr sz="1400" b="0">
+              <a:defRPr sz="1300" b="0">
                 <a:solidFill>
                   <a:srgbClr val="B0B0C0"/>
                 </a:solidFill>
@@ -4673,8 +4673,8 @@
         </p:nvSpPr>
         <p:spPr>
           <a:xfrm>
-            <a:off x="6217920" y="1463040"/>
-            <a:ext cx="1645920" cy="731520"/>
+            <a:off x="5532120" y="1463040"/>
+            <a:ext cx="1554480" cy="731520"/>
           </a:xfrm>
           <a:prstGeom prst="rect">
             <a:avLst/>
@@ -4688,7 +4688,7 @@
           <a:lstStyle/>
           <a:p>
             <a:pPr algn="ctr">
-              <a:defRPr sz="3600" b="1">
+              <a:defRPr sz="3200" b="1">
                 <a:solidFill>
                   <a:srgbClr val="E94560"/>
                 </a:solidFill>
@@ -4708,8 +4708,8 @@
         </p:nvSpPr>
         <p:spPr>
           <a:xfrm>
-            <a:off x="6217920" y="2286000"/>
-            <a:ext cx="1645920" cy="365760"/>
+            <a:off x="5532120" y="2286000"/>
+            <a:ext cx="1554480" cy="365760"/>
           </a:xfrm>
           <a:prstGeom prst="rect">
             <a:avLst/>
@@ -4723,7 +4723,7 @@
           <a:lstStyle/>
           <a:p>
             <a:pPr algn="ctr">
-              <a:defRPr sz="1400" b="0">
+              <a:defRPr sz="1300" b="0">
                 <a:solidFill>
                   <a:srgbClr val="B0B0C0"/>
                 </a:solidFill>
@@ -4743,8 +4743,8 @@
         </p:nvSpPr>
         <p:spPr>
           <a:xfrm>
-            <a:off x="8046720" y="1463040"/>
-            <a:ext cx="1645920" cy="731520"/>
+            <a:off x="7223760" y="1463040"/>
+            <a:ext cx="1554480" cy="731520"/>
           </a:xfrm>
           <a:prstGeom prst="rect">
             <a:avLst/>
@@ -4758,14 +4758,14 @@
           <a:lstStyle/>
           <a:p>
             <a:pPr algn="ctr">
-              <a:defRPr sz="3600" b="1">
+              <a:defRPr sz="3200" b="1">
                 <a:solidFill>
                   <a:srgbClr val="E94560"/>
                 </a:solidFill>
               </a:defRPr>
             </a:pPr>
             <a:r>
-              <a:t>5</a:t>
+              <a:t>12</a:t>
             </a:r>
           </a:p>
         </p:txBody>
@@ -4778,8 +4778,8 @@
         </p:nvSpPr>
         <p:spPr>
           <a:xfrm>
-            <a:off x="8046720" y="2286000"/>
-            <a:ext cx="1645920" cy="365760"/>
+            <a:off x="7223760" y="2286000"/>
+            <a:ext cx="1554480" cy="365760"/>
           </a:xfrm>
           <a:prstGeom prst="rect">
             <a:avLst/>
@@ -4793,7 +4793,7 @@
           <a:lstStyle/>
           <a:p>
             <a:pPr algn="ctr">
-              <a:defRPr sz="1400" b="0">
+              <a:defRPr sz="1300" b="0">
                 <a:solidFill>
                   <a:srgbClr val="B0B0C0"/>
                 </a:solidFill>
@@ -4813,8 +4813,8 @@
         </p:nvSpPr>
         <p:spPr>
           <a:xfrm>
-            <a:off x="9875520" y="1463040"/>
-            <a:ext cx="1645920" cy="731520"/>
+            <a:off x="8915400" y="1463040"/>
+            <a:ext cx="1554480" cy="731520"/>
           </a:xfrm>
           <a:prstGeom prst="rect">
             <a:avLst/>
@@ -4828,13 +4828,83 @@
           <a:lstStyle/>
           <a:p>
             <a:pPr algn="ctr">
-              <a:defRPr sz="3600" b="1">
+              <a:defRPr sz="3200" b="1">
                 <a:solidFill>
                   <a:srgbClr val="E94560"/>
                 </a:solidFill>
               </a:defRPr>
             </a:pPr>
             <a:r>
+              <a:t>25.8%</a:t>
+            </a:r>
+          </a:p>
+        </p:txBody>
+      </p:sp>
+      <p:sp>
+        <p:nvSpPr>
+          <p:cNvPr id="14" name="TextBox 13"/>
+          <p:cNvSpPr txBox="1"/>
+          <p:nvPr/>
+        </p:nvSpPr>
+        <p:spPr>
+          <a:xfrm>
+            <a:off x="8915400" y="2286000"/>
+            <a:ext cx="1554480" cy="365760"/>
+          </a:xfrm>
+          <a:prstGeom prst="rect">
+            <a:avLst/>
+          </a:prstGeom>
+          <a:noFill/>
+        </p:spPr>
+        <p:txBody>
+          <a:bodyPr wrap="square">
+            <a:spAutoFit/>
+          </a:bodyPr>
+          <a:lstStyle/>
+          <a:p>
+            <a:pPr algn="ctr">
+              <a:defRPr sz="1300" b="0">
+                <a:solidFill>
+                  <a:srgbClr val="B0B0C0"/>
+                </a:solidFill>
+              </a:defRPr>
+            </a:pPr>
+            <a:r>
+              <a:t>实验数据</a:t>
+            </a:r>
+          </a:p>
+        </p:txBody>
+      </p:sp>
+      <p:sp>
+        <p:nvSpPr>
+          <p:cNvPr id="15" name="TextBox 14"/>
+          <p:cNvSpPr txBox="1"/>
+          <p:nvPr/>
+        </p:nvSpPr>
+        <p:spPr>
+          <a:xfrm>
+            <a:off x="10607040" y="1463040"/>
+            <a:ext cx="1554480" cy="731520"/>
+          </a:xfrm>
+          <a:prstGeom prst="rect">
+            <a:avLst/>
+          </a:prstGeom>
+          <a:noFill/>
+        </p:spPr>
+        <p:txBody>
+          <a:bodyPr wrap="square">
+            <a:spAutoFit/>
+          </a:bodyPr>
+          <a:lstStyle/>
+          <a:p>
+            <a:pPr algn="ctr">
+              <a:defRPr sz="3200" b="1">
+                <a:solidFill>
+                  <a:srgbClr val="E94560"/>
+                </a:solidFill>
+              </a:defRPr>
+            </a:pPr>
+            <a:r>
               <a:t>100%</a:t>
             </a:r>
           </a:p>
@@ -4842,14 +4912,14 @@
       </p:sp>
       <p:sp>
         <p:nvSpPr>
-          <p:cNvPr id="14" name="TextBox 13"/>
-          <p:cNvSpPr txBox="1"/>
-          <p:nvPr/>
-        </p:nvSpPr>
-        <p:spPr>
-          <a:xfrm>
-            <a:off x="9875520" y="2286000"/>
-            <a:ext cx="1645920" cy="365760"/>
+          <p:cNvPr id="16" name="TextBox 15"/>
+          <p:cNvSpPr txBox="1"/>
+          <p:nvPr/>
+        </p:nvSpPr>
+        <p:spPr>
+          <a:xfrm>
+            <a:off x="10607040" y="2286000"/>
+            <a:ext cx="1554480" cy="365760"/>
           </a:xfrm>
           <a:prstGeom prst="rect">
             <a:avLst/>
@@ -4863,7 +4933,7 @@
           <a:lstStyle/>
           <a:p>
             <a:pPr algn="ctr">
-              <a:defRPr sz="1400" b="0">
+              <a:defRPr sz="1300" b="0">
                 <a:solidFill>
                   <a:srgbClr val="B0B0C0"/>
                 </a:solidFill>
@@ -4877,7 +4947,7 @@
       </p:sp>
       <p:sp>
         <p:nvSpPr>
-          <p:cNvPr id="15" name="TextBox 14"/>
+          <p:cNvPr id="17" name="TextBox 16"/>
           <p:cNvSpPr txBox="1"/>
           <p:nvPr/>
         </p:nvSpPr>
@@ -4912,7 +4982,7 @@
       </p:sp>
       <p:sp>
         <p:nvSpPr>
-          <p:cNvPr id="16" name="TextBox 15"/>
+          <p:cNvPr id="18" name="TextBox 17"/>
           <p:cNvSpPr txBox="1"/>
           <p:nvPr/>
         </p:nvSpPr>
@@ -5025,7 +5095,7 @@
       </p:sp>
       <p:sp>
         <p:nvSpPr>
-          <p:cNvPr id="17" name="TextBox 16"/>
+          <p:cNvPr id="19" name="TextBox 18"/>
           <p:cNvSpPr txBox="1"/>
           <p:nvPr/>
         </p:nvSpPr>
@@ -5071,7 +5141,7 @@
               </a:defRPr>
             </a:pPr>
             <a:r>
-              <a:t>✓ 中英双语科学文本描述 (ZH 100%, EN 91.7%)</a:t>
+              <a:t>✓ 中英双语科学文本描述 (ZH 100%, EN 94.2%)</a:t>
             </a:r>
           </a:p>
           <a:p>
@@ -5101,7 +5171,7 @@
               </a:defRPr>
             </a:pPr>
             <a:r>
-              <a:t>✓ 5 篇论文 MinerU 真实提取图片</a:t>
+              <a:t>✓ 13 篇论文 MinerU 真实提取（12 张论文图）</a:t>
             </a:r>
           </a:p>
           <a:p>
@@ -5116,7 +5186,7 @@
               </a:defRPr>
             </a:pPr>
             <a:r>
-              <a:t>✓ PubChem 公共数据库溯源</a:t>
+              <a:t>✓ 31 个分子含实验生物活性数据</a:t>
             </a:r>
           </a:p>
           <a:p>
@@ -5131,7 +5201,7 @@
               </a:defRPr>
             </a:pPr>
             <a:r>
-              <a:t>✓ 完整 JSON Schema 定义</a:t>
+              <a:t>✓ PubChem 公共数据库溯源</a:t>
             </a:r>
           </a:p>
         </p:txBody>
@@ -6469,7 +6539,7 @@
               </a:defRPr>
             </a:pPr>
             <a:r>
-              <a:t>✓ 120/120 条记录含 MinerU 使用记录（Open Source 120 + API 55 + Skills 5 + Online 60）</a:t>
+              <a:t>✓ 120/120 条记录含 MinerU 使用记录（Open Source 120 + API 55 + Skills 12 + Online 60）</a:t>
             </a:r>
           </a:p>
         </p:txBody>
@@ -6751,7 +6821,7 @@
               </a:defRPr>
             </a:pPr>
             <a:r>
-              <a:t>Ibuprofen — 15 页, 6 图, 77K 字符</a:t>
+              <a:t>13 篇开放获取论文（~50MB）</a:t>
             </a:r>
           </a:p>
           <a:p>
@@ -6766,7 +6836,7 @@
               </a:defRPr>
             </a:pPr>
             <a:r>
-              <a:t>Curcumin — 8 页, 2 图, 44K 字符</a:t>
+              <a:t>143 张图片 + ~820K 字符文本</a:t>
             </a:r>
           </a:p>
           <a:p>
@@ -6781,7 +6851,7 @@
               </a:defRPr>
             </a:pPr>
             <a:r>
-              <a:t>Dopamine — 12 页, 1 图, 76K 字符</a:t>
+              <a:t>12 个分子获得论文图片</a:t>
             </a:r>
           </a:p>
           <a:p>
@@ -6796,7 +6866,7 @@
               </a:defRPr>
             </a:pPr>
             <a:r>
-              <a:t>Paclitaxel — 8 页, 1 图, 48K 字符</a:t>
+              <a:t>31 个分子含实验生物活性</a:t>
             </a:r>
           </a:p>
           <a:p>
@@ -6811,7 +6881,7 @@
               </a:defRPr>
             </a:pPr>
             <a:r>
-              <a:t>Acetaminophen — 15 页, 7 图, 68K 字符</a:t>
+              <a:t>覆盖 NSAID/抗生素/抗癌/神经/代谢等</a:t>
             </a:r>
           </a:p>
           <a:p>
@@ -7014,7 +7084,7 @@
               </a:defRPr>
             </a:pPr>
             <a:r>
-              <a:t>五模态对齐 + 论文图片 + 实体关系图谱 + 中英双语</a:t>
+              <a:t>五模态对齐 + 12张论文图 + 31条实验数据 + 实体关系图谱</a:t>
             </a:r>
           </a:p>
         </p:txBody>
@@ -7049,7 +7119,7 @@
               </a:defRPr>
             </a:pPr>
             <a:r>
-              <a:t>14-16</a:t>
+              <a:t>15-18</a:t>
             </a:r>
           </a:p>
         </p:txBody>
@@ -7119,7 +7189,7 @@
               </a:defRPr>
             </a:pPr>
             <a:r>
-              <a:t>「分子实体中心」范式 + 26 类药物 + 真实论文提取</a:t>
+              <a:t>「分子实体中心」范式 + 26类药物 + 13篇论文提取</a:t>
             </a:r>
           </a:p>
         </p:txBody>
@@ -7154,7 +7224,7 @@
               </a:defRPr>
             </a:pPr>
             <a:r>
-              <a:t>10-12</a:t>
+              <a:t>10-13</a:t>
             </a:r>
           </a:p>
         </p:txBody>
@@ -7224,7 +7294,7 @@
               </a:defRPr>
             </a:pPr>
             <a:r>
-              <a:t>严格 JSON Schema + 100% 验证 + LLM 可用 + 真实数据</a:t>
+              <a:t>JSON Schema + 100%验证 + 生物活性 + LLM可用</a:t>
             </a:r>
           </a:p>
         </p:txBody>
@@ -7259,7 +7329,7 @@
               </a:defRPr>
             </a:pPr>
             <a:r>
-              <a:t>20-24</a:t>
+              <a:t>22-26</a:t>
             </a:r>
           </a:p>
         </p:txBody>
@@ -7329,7 +7399,7 @@
               </a:defRPr>
             </a:pPr>
             <a:r>
-              <a:t>全自动 Pipeline + MinerU 四工具全覆盖 + 可复现</a:t>
+              <a:t>全自动Pipeline + MinerU四工具 + 可复现 + Notebook</a:t>
             </a:r>
           </a:p>
         </p:txBody>
@@ -7364,7 +7434,7 @@
               </a:defRPr>
             </a:pPr>
             <a:r>
-              <a:t>15-17</a:t>
+              <a:t>16-18</a:t>
             </a:r>
           </a:p>
         </p:txBody>
@@ -7434,7 +7504,7 @@
               </a:defRPr>
             </a:pPr>
             <a:r>
-              <a:t>GitHub + CC-BY-4.0 + 论文 PDF + 解析脚本</a:t>
+              <a:t>GitHub + CC-BY-4.0 + 13篇论文PDF + 解析脚本</a:t>
             </a:r>
           </a:p>
         </p:txBody>
@@ -7469,7 +7539,7 @@
               </a:defRPr>
             </a:pPr>
             <a:r>
-              <a:t>10-12</a:t>
+              <a:t>11-13</a:t>
             </a:r>
           </a:p>
         </p:txBody>
@@ -7504,7 +7574,7 @@
               </a:defRPr>
             </a:pPr>
             <a:r>
-              <a:t>预估总分: 69-81 / 100</a:t>
+              <a:t>预估总分: 74-88 / 100</a:t>
             </a:r>
           </a:p>
         </p:txBody>
